--- a/eval/out/chart_variants.pptx
+++ b/eval/out/chart_variants.pptx
@@ -974,7 +974,7 @@
           </c:val>
         </c:ser>
         <c:dLbls>
-          <c:numFmt formatCode="0&quot;%&quot;" sourceLinked="0"/>
+          <c:numFmt formatCode="#,##0.#&quot;%&quot;" sourceLinked="0"/>
           <c:txPr>
             <a:bodyPr/>
             <a:lstStyle/>
@@ -1426,7 +1426,7 @@
           </c:tx>
           <c:spPr>
             <a:solidFill>
-              <a:srgbClr val="51626F"/>
+              <a:srgbClr val="C3BFB4"/>
             </a:solidFill>
           </c:spPr>
           <c:cat>

--- a/eval/out/chart_variants.pptx
+++ b/eval/out/chart_variants.pptx
@@ -4624,8 +4624,8 @@
         </p:nvSpPr>
         <p:spPr>
           <a:xfrm>
-            <a:off x="411480" y="511423"/>
-            <a:ext cx="11369040" cy="303033"/>
+            <a:off x="411480" y="274320"/>
+            <a:ext cx="11369040" cy="310608"/>
           </a:xfrm>
           <a:prstGeom prst="rect">
             <a:avLst/>
@@ -4640,7 +4640,7 @@
           <a:p>
             <a:pPr algn="l">
               <a:lnSpc>
-                <a:spcPts val="2386"/>
+                <a:spcPts val="2445"/>
               </a:lnSpc>
               <a:spcBef>
                 <a:spcPts val="0"/>
@@ -4779,7 +4779,7 @@
         </p:nvGraphicFramePr>
         <p:xfrm>
           <a:off x="411480" y="1051560"/>
-          <a:ext cx="11369040" cy="4812466"/>
+          <a:ext cx="11369040" cy="4782038"/>
         </p:xfrm>
         <a:graphic>
           <a:graphicData uri="http://schemas.openxmlformats.org/drawingml/2006/chart">
@@ -4859,8 +4859,8 @@
         </p:nvSpPr>
         <p:spPr>
           <a:xfrm>
-            <a:off x="411480" y="5900602"/>
-            <a:ext cx="32004" cy="182880"/>
+            <a:off x="411480" y="5870174"/>
+            <a:ext cx="32004" cy="173143"/>
           </a:xfrm>
           <a:prstGeom prst="rect">
             <a:avLst/>
@@ -4903,8 +4903,8 @@
         </p:nvSpPr>
         <p:spPr>
           <a:xfrm>
-            <a:off x="480060" y="5900602"/>
-            <a:ext cx="11300460" cy="182880"/>
+            <a:off x="480060" y="5870174"/>
+            <a:ext cx="11300460" cy="173143"/>
           </a:xfrm>
           <a:prstGeom prst="rect">
             <a:avLst/>
@@ -4918,6 +4918,9 @@
           <a:lstStyle/>
           <a:p>
             <a:pPr algn="l">
+              <a:lnSpc>
+                <a:spcPts val="1363"/>
+              </a:lnSpc>
               <a:spcBef>
                 <a:spcPts val="0"/>
               </a:spcBef>
@@ -4932,7 +4935,133 @@
                 </a:solidFill>
                 <a:latin typeface="Segoe UI"/>
               </a:rPr>
-              <a:t>The 2024 capacity unlock bent the curve; the dashed segment is committed pipeline, not hope.</a:t>
+              <a:t>The </a:t>
+            </a:r>
+            <a:r>
+              <a:rPr sz="1000" b="1" i="0">
+                <a:solidFill>
+                  <a:srgbClr val="2B2B2B"/>
+                </a:solidFill>
+                <a:latin typeface="Segoe UI"/>
+              </a:rPr>
+              <a:t>2024 </a:t>
+            </a:r>
+            <a:r>
+              <a:rPr sz="1000" b="1" i="0">
+                <a:solidFill>
+                  <a:srgbClr val="2B2B2B"/>
+                </a:solidFill>
+                <a:latin typeface="Segoe UI"/>
+              </a:rPr>
+              <a:t>capacity </a:t>
+            </a:r>
+            <a:r>
+              <a:rPr sz="1000" b="1" i="0">
+                <a:solidFill>
+                  <a:srgbClr val="2B2B2B"/>
+                </a:solidFill>
+                <a:latin typeface="Segoe UI"/>
+              </a:rPr>
+              <a:t>unlock </a:t>
+            </a:r>
+            <a:r>
+              <a:rPr sz="1000" b="1" i="0">
+                <a:solidFill>
+                  <a:srgbClr val="2B2B2B"/>
+                </a:solidFill>
+                <a:latin typeface="Segoe UI"/>
+              </a:rPr>
+              <a:t>bent </a:t>
+            </a:r>
+            <a:r>
+              <a:rPr sz="1000" b="1" i="0">
+                <a:solidFill>
+                  <a:srgbClr val="2B2B2B"/>
+                </a:solidFill>
+                <a:latin typeface="Segoe UI"/>
+              </a:rPr>
+              <a:t>the </a:t>
+            </a:r>
+            <a:r>
+              <a:rPr sz="1000" b="1" i="0">
+                <a:solidFill>
+                  <a:srgbClr val="2B2B2B"/>
+                </a:solidFill>
+                <a:latin typeface="Segoe UI"/>
+              </a:rPr>
+              <a:t>curve; </a:t>
+            </a:r>
+            <a:r>
+              <a:rPr sz="1000" b="1" i="0">
+                <a:solidFill>
+                  <a:srgbClr val="2B2B2B"/>
+                </a:solidFill>
+                <a:latin typeface="Segoe UI"/>
+              </a:rPr>
+              <a:t>the </a:t>
+            </a:r>
+            <a:r>
+              <a:rPr sz="1000" b="1" i="0">
+                <a:solidFill>
+                  <a:srgbClr val="2B2B2B"/>
+                </a:solidFill>
+                <a:latin typeface="Segoe UI"/>
+              </a:rPr>
+              <a:t>dashed </a:t>
+            </a:r>
+            <a:r>
+              <a:rPr sz="1000" b="1" i="0">
+                <a:solidFill>
+                  <a:srgbClr val="2B2B2B"/>
+                </a:solidFill>
+                <a:latin typeface="Segoe UI"/>
+              </a:rPr>
+              <a:t>segment </a:t>
+            </a:r>
+            <a:r>
+              <a:rPr sz="1000" b="1" i="0">
+                <a:solidFill>
+                  <a:srgbClr val="2B2B2B"/>
+                </a:solidFill>
+                <a:latin typeface="Segoe UI"/>
+              </a:rPr>
+              <a:t>is </a:t>
+            </a:r>
+            <a:r>
+              <a:rPr sz="1000" b="1" i="0">
+                <a:solidFill>
+                  <a:srgbClr val="2B2B2B"/>
+                </a:solidFill>
+                <a:latin typeface="Segoe UI"/>
+              </a:rPr>
+              <a:t>committed </a:t>
+            </a:r>
+            <a:r>
+              <a:rPr sz="1000" b="1" i="0">
+                <a:solidFill>
+                  <a:srgbClr val="2B2B2B"/>
+                </a:solidFill>
+                <a:latin typeface="Segoe UI"/>
+              </a:rPr>
+              <a:t>pipeline, </a:t>
+            </a:r>
+            <a:r>
+              <a:rPr sz="1000" b="1" i="0">
+                <a:solidFill>
+                  <a:srgbClr val="2B2B2B"/>
+                </a:solidFill>
+                <a:latin typeface="Segoe UI"/>
+              </a:rPr>
+              <a:t>not </a:t>
+            </a:r>
+            <a:r>
+              <a:rPr sz="1000" b="1" i="0">
+                <a:solidFill>
+                  <a:srgbClr val="2B2B2B"/>
+                </a:solidFill>
+                <a:latin typeface="Segoe UI"/>
+              </a:rPr>
+              <a:t>hope.</a:t>
             </a:r>
           </a:p>
         </p:txBody>
@@ -4945,8 +5074,8 @@
         </p:nvSpPr>
         <p:spPr>
           <a:xfrm>
-            <a:off x="411480" y="6193210"/>
-            <a:ext cx="11369040" cy="143582"/>
+            <a:off x="411480" y="6189621"/>
+            <a:ext cx="11369040" cy="147171"/>
           </a:xfrm>
           <a:prstGeom prst="rect">
             <a:avLst/>
@@ -4961,7 +5090,7 @@
           <a:p>
             <a:pPr algn="l">
               <a:lnSpc>
-                <a:spcPts val="1130"/>
+                <a:spcPts val="1158"/>
               </a:lnSpc>
               <a:spcBef>
                 <a:spcPts val="0"/>
@@ -5144,8 +5273,8 @@
         </p:nvSpPr>
         <p:spPr>
           <a:xfrm>
-            <a:off x="411480" y="511423"/>
-            <a:ext cx="11369040" cy="303033"/>
+            <a:off x="411480" y="274320"/>
+            <a:ext cx="11369040" cy="310608"/>
           </a:xfrm>
           <a:prstGeom prst="rect">
             <a:avLst/>
@@ -5160,7 +5289,7 @@
           <a:p>
             <a:pPr algn="l">
               <a:lnSpc>
-                <a:spcPts val="2386"/>
+                <a:spcPts val="2445"/>
               </a:lnSpc>
               <a:spcBef>
                 <a:spcPts val="0"/>
@@ -5308,7 +5437,7 @@
         </p:nvGraphicFramePr>
         <p:xfrm>
           <a:off x="411480" y="1051560"/>
-          <a:ext cx="11369040" cy="4812466"/>
+          <a:ext cx="11369040" cy="4782038"/>
         </p:xfrm>
         <a:graphic>
           <a:graphicData uri="http://schemas.openxmlformats.org/drawingml/2006/chart">
@@ -5324,8 +5453,8 @@
         </p:nvSpPr>
         <p:spPr>
           <a:xfrm>
-            <a:off x="411480" y="5900602"/>
-            <a:ext cx="32004" cy="182880"/>
+            <a:off x="411480" y="5870174"/>
+            <a:ext cx="32004" cy="173143"/>
           </a:xfrm>
           <a:prstGeom prst="rect">
             <a:avLst/>
@@ -5368,8 +5497,8 @@
         </p:nvSpPr>
         <p:spPr>
           <a:xfrm>
-            <a:off x="480060" y="5900602"/>
-            <a:ext cx="11300460" cy="182880"/>
+            <a:off x="480060" y="5870174"/>
+            <a:ext cx="11300460" cy="173143"/>
           </a:xfrm>
           <a:prstGeom prst="rect">
             <a:avLst/>
@@ -5383,6 +5512,9 @@
           <a:lstStyle/>
           <a:p>
             <a:pPr algn="l">
+              <a:lnSpc>
+                <a:spcPts val="1363"/>
+              </a:lnSpc>
               <a:spcBef>
                 <a:spcPts val="0"/>
               </a:spcBef>
@@ -5397,7 +5529,133 @@
                 </a:solidFill>
                 <a:latin typeface="Segoe UI"/>
               </a:rPr>
-              <a:t>Two levers add $30M; two headwinds take $30M — the bridge proves resilience, not stagnation.</a:t>
+              <a:t>Two </a:t>
+            </a:r>
+            <a:r>
+              <a:rPr sz="1000" b="1" i="0">
+                <a:solidFill>
+                  <a:srgbClr val="2B2B2B"/>
+                </a:solidFill>
+                <a:latin typeface="Segoe UI"/>
+              </a:rPr>
+              <a:t>levers </a:t>
+            </a:r>
+            <a:r>
+              <a:rPr sz="1000" b="1" i="0">
+                <a:solidFill>
+                  <a:srgbClr val="2B2B2B"/>
+                </a:solidFill>
+                <a:latin typeface="Segoe UI"/>
+              </a:rPr>
+              <a:t>add </a:t>
+            </a:r>
+            <a:r>
+              <a:rPr sz="1000" b="1" i="0">
+                <a:solidFill>
+                  <a:srgbClr val="2B2B2B"/>
+                </a:solidFill>
+                <a:latin typeface="Segoe UI"/>
+              </a:rPr>
+              <a:t>$30M; </a:t>
+            </a:r>
+            <a:r>
+              <a:rPr sz="1000" b="1" i="0">
+                <a:solidFill>
+                  <a:srgbClr val="2B2B2B"/>
+                </a:solidFill>
+                <a:latin typeface="Segoe UI"/>
+              </a:rPr>
+              <a:t>two </a:t>
+            </a:r>
+            <a:r>
+              <a:rPr sz="1000" b="1" i="0">
+                <a:solidFill>
+                  <a:srgbClr val="2B2B2B"/>
+                </a:solidFill>
+                <a:latin typeface="Segoe UI"/>
+              </a:rPr>
+              <a:t>headwinds </a:t>
+            </a:r>
+            <a:r>
+              <a:rPr sz="1000" b="1" i="0">
+                <a:solidFill>
+                  <a:srgbClr val="2B2B2B"/>
+                </a:solidFill>
+                <a:latin typeface="Segoe UI"/>
+              </a:rPr>
+              <a:t>take </a:t>
+            </a:r>
+            <a:r>
+              <a:rPr sz="1000" b="1" i="0">
+                <a:solidFill>
+                  <a:srgbClr val="2B2B2B"/>
+                </a:solidFill>
+                <a:latin typeface="Segoe UI"/>
+              </a:rPr>
+              <a:t>$30M </a:t>
+            </a:r>
+            <a:r>
+              <a:rPr sz="1000" b="1" i="0">
+                <a:solidFill>
+                  <a:srgbClr val="2B2B2B"/>
+                </a:solidFill>
+                <a:latin typeface="Segoe UI"/>
+              </a:rPr>
+              <a:t>— </a:t>
+            </a:r>
+            <a:r>
+              <a:rPr sz="1000" b="1" i="0">
+                <a:solidFill>
+                  <a:srgbClr val="2B2B2B"/>
+                </a:solidFill>
+                <a:latin typeface="Segoe UI"/>
+              </a:rPr>
+              <a:t>the </a:t>
+            </a:r>
+            <a:r>
+              <a:rPr sz="1000" b="1" i="0">
+                <a:solidFill>
+                  <a:srgbClr val="2B2B2B"/>
+                </a:solidFill>
+                <a:latin typeface="Segoe UI"/>
+              </a:rPr>
+              <a:t>bridge </a:t>
+            </a:r>
+            <a:r>
+              <a:rPr sz="1000" b="1" i="0">
+                <a:solidFill>
+                  <a:srgbClr val="2B2B2B"/>
+                </a:solidFill>
+                <a:latin typeface="Segoe UI"/>
+              </a:rPr>
+              <a:t>proves </a:t>
+            </a:r>
+            <a:r>
+              <a:rPr sz="1000" b="1" i="0">
+                <a:solidFill>
+                  <a:srgbClr val="2B2B2B"/>
+                </a:solidFill>
+                <a:latin typeface="Segoe UI"/>
+              </a:rPr>
+              <a:t>resilience, </a:t>
+            </a:r>
+            <a:r>
+              <a:rPr sz="1000" b="1" i="0">
+                <a:solidFill>
+                  <a:srgbClr val="2B2B2B"/>
+                </a:solidFill>
+                <a:latin typeface="Segoe UI"/>
+              </a:rPr>
+              <a:t>not </a:t>
+            </a:r>
+            <a:r>
+              <a:rPr sz="1000" b="1" i="0">
+                <a:solidFill>
+                  <a:srgbClr val="2B2B2B"/>
+                </a:solidFill>
+                <a:latin typeface="Segoe UI"/>
+              </a:rPr>
+              <a:t>stagnation.</a:t>
             </a:r>
           </a:p>
         </p:txBody>
@@ -5410,8 +5668,8 @@
         </p:nvSpPr>
         <p:spPr>
           <a:xfrm>
-            <a:off x="411480" y="6193210"/>
-            <a:ext cx="11369040" cy="143582"/>
+            <a:off x="411480" y="6189621"/>
+            <a:ext cx="11369040" cy="147171"/>
           </a:xfrm>
           <a:prstGeom prst="rect">
             <a:avLst/>
@@ -5426,7 +5684,7 @@
           <a:p>
             <a:pPr algn="l">
               <a:lnSpc>
-                <a:spcPts val="1130"/>
+                <a:spcPts val="1158"/>
               </a:lnSpc>
               <a:spcBef>
                 <a:spcPts val="0"/>
@@ -5609,8 +5867,8 @@
         </p:nvSpPr>
         <p:spPr>
           <a:xfrm>
-            <a:off x="411480" y="511423"/>
-            <a:ext cx="11369040" cy="303033"/>
+            <a:off x="411480" y="274320"/>
+            <a:ext cx="11369040" cy="310608"/>
           </a:xfrm>
           <a:prstGeom prst="rect">
             <a:avLst/>
@@ -5625,7 +5883,7 @@
           <a:p>
             <a:pPr algn="l">
               <a:lnSpc>
-                <a:spcPts val="2386"/>
+                <a:spcPts val="2445"/>
               </a:lnSpc>
               <a:spcBef>
                 <a:spcPts val="0"/>
@@ -5746,7 +6004,7 @@
         </p:nvGraphicFramePr>
         <p:xfrm>
           <a:off x="411480" y="1051560"/>
-          <a:ext cx="11369040" cy="4812466"/>
+          <a:ext cx="11369040" cy="4782038"/>
         </p:xfrm>
         <a:graphic>
           <a:graphicData uri="http://schemas.openxmlformats.org/drawingml/2006/chart">
@@ -5762,7 +6020,7 @@
         </p:nvCxnSpPr>
         <p:spPr>
           <a:xfrm>
-            <a:off x="1548384" y="2305688"/>
+            <a:off x="1548384" y="2297759"/>
             <a:ext cx="9891065" cy="0"/>
           </a:xfrm>
           <a:prstGeom prst="line">
@@ -5798,7 +6056,7 @@
         </p:nvSpPr>
         <p:spPr>
           <a:xfrm>
-            <a:off x="1548384" y="2141096"/>
+            <a:off x="1548384" y="2133167"/>
             <a:ext cx="9891065" cy="146304"/>
           </a:xfrm>
           <a:prstGeom prst="rect">
@@ -5840,8 +6098,8 @@
         </p:nvSpPr>
         <p:spPr>
           <a:xfrm>
-            <a:off x="411480" y="5900602"/>
-            <a:ext cx="32004" cy="182880"/>
+            <a:off x="411480" y="5870174"/>
+            <a:ext cx="32004" cy="173143"/>
           </a:xfrm>
           <a:prstGeom prst="rect">
             <a:avLst/>
@@ -5884,8 +6142,8 @@
         </p:nvSpPr>
         <p:spPr>
           <a:xfrm>
-            <a:off x="480060" y="5900602"/>
-            <a:ext cx="11300460" cy="182880"/>
+            <a:off x="480060" y="5870174"/>
+            <a:ext cx="11300460" cy="173143"/>
           </a:xfrm>
           <a:prstGeom prst="rect">
             <a:avLst/>
@@ -5899,6 +6157,9 @@
           <a:lstStyle/>
           <a:p>
             <a:pPr algn="l">
+              <a:lnSpc>
+                <a:spcPts val="1363"/>
+              </a:lnSpc>
               <a:spcBef>
                 <a:spcPts val="0"/>
               </a:spcBef>
@@ -5913,7 +6174,88 @@
                 </a:solidFill>
                 <a:latin typeface="Segoe UI"/>
               </a:rPr>
-              <a:t>Kanpur and Nashik sit below benchmark — the consolidation candidates.</a:t>
+              <a:t>Kanpur </a:t>
+            </a:r>
+            <a:r>
+              <a:rPr sz="1000" b="1" i="0">
+                <a:solidFill>
+                  <a:srgbClr val="2B2B2B"/>
+                </a:solidFill>
+                <a:latin typeface="Segoe UI"/>
+              </a:rPr>
+              <a:t>and </a:t>
+            </a:r>
+            <a:r>
+              <a:rPr sz="1000" b="1" i="0">
+                <a:solidFill>
+                  <a:srgbClr val="2B2B2B"/>
+                </a:solidFill>
+                <a:latin typeface="Segoe UI"/>
+              </a:rPr>
+              <a:t>Nashik </a:t>
+            </a:r>
+            <a:r>
+              <a:rPr sz="1000" b="1" i="0">
+                <a:solidFill>
+                  <a:srgbClr val="2B2B2B"/>
+                </a:solidFill>
+                <a:latin typeface="Segoe UI"/>
+              </a:rPr>
+              <a:t>sit </a:t>
+            </a:r>
+            <a:r>
+              <a:rPr sz="1000" b="1" i="0">
+                <a:solidFill>
+                  <a:srgbClr val="2B2B2B"/>
+                </a:solidFill>
+                <a:latin typeface="Segoe UI"/>
+              </a:rPr>
+              <a:t>below </a:t>
+            </a:r>
+            <a:r>
+              <a:rPr sz="1000" b="1" i="0">
+                <a:solidFill>
+                  <a:srgbClr val="2B2B2B"/>
+                </a:solidFill>
+                <a:latin typeface="Segoe UI"/>
+              </a:rPr>
+              <a:t>benchmark </a:t>
+            </a:r>
+            <a:r>
+              <a:rPr sz="1000" b="1" i="0">
+                <a:solidFill>
+                  <a:srgbClr val="2B2B2B"/>
+                </a:solidFill>
+                <a:latin typeface="Segoe UI"/>
+              </a:rPr>
+              <a:t>— </a:t>
+            </a:r>
+            <a:r>
+              <a:rPr sz="1000" b="1" i="0">
+                <a:solidFill>
+                  <a:srgbClr val="2B2B2B"/>
+                </a:solidFill>
+                <a:latin typeface="Segoe UI"/>
+              </a:rPr>
+              <a:t>the </a:t>
+            </a:r>
+            <a:r>
+              <a:rPr sz="1000" b="1" i="0">
+                <a:solidFill>
+                  <a:srgbClr val="2B2B2B"/>
+                </a:solidFill>
+                <a:latin typeface="Segoe UI"/>
+              </a:rPr>
+              <a:t>consolidation </a:t>
+            </a:r>
+            <a:r>
+              <a:rPr sz="1000" b="1" i="0">
+                <a:solidFill>
+                  <a:srgbClr val="2B2B2B"/>
+                </a:solidFill>
+                <a:latin typeface="Segoe UI"/>
+              </a:rPr>
+              <a:t>candidates.</a:t>
             </a:r>
           </a:p>
         </p:txBody>
@@ -5926,8 +6268,8 @@
         </p:nvSpPr>
         <p:spPr>
           <a:xfrm>
-            <a:off x="411480" y="6193210"/>
-            <a:ext cx="11369040" cy="143582"/>
+            <a:off x="411480" y="6189621"/>
+            <a:ext cx="11369040" cy="147171"/>
           </a:xfrm>
           <a:prstGeom prst="rect">
             <a:avLst/>
@@ -5942,7 +6284,7 @@
           <a:p>
             <a:pPr algn="l">
               <a:lnSpc>
-                <a:spcPts val="1130"/>
+                <a:spcPts val="1158"/>
               </a:lnSpc>
               <a:spcBef>
                 <a:spcPts val="0"/>
@@ -6125,8 +6467,8 @@
         </p:nvSpPr>
         <p:spPr>
           <a:xfrm>
-            <a:off x="411480" y="511423"/>
-            <a:ext cx="11369040" cy="303033"/>
+            <a:off x="411480" y="274320"/>
+            <a:ext cx="11369040" cy="310608"/>
           </a:xfrm>
           <a:prstGeom prst="rect">
             <a:avLst/>
@@ -6141,7 +6483,7 @@
           <a:p>
             <a:pPr algn="l">
               <a:lnSpc>
-                <a:spcPts val="2386"/>
+                <a:spcPts val="2445"/>
               </a:lnSpc>
               <a:spcBef>
                 <a:spcPts val="0"/>
@@ -6269,8 +6611,8 @@
         </p:nvSpPr>
         <p:spPr>
           <a:xfrm>
-            <a:off x="411480" y="6193210"/>
-            <a:ext cx="11369040" cy="143582"/>
+            <a:off x="411480" y="6189621"/>
+            <a:ext cx="11369040" cy="147171"/>
           </a:xfrm>
           <a:prstGeom prst="rect">
             <a:avLst/>
@@ -6285,7 +6627,7 @@
           <a:p>
             <a:pPr algn="l">
               <a:lnSpc>
-                <a:spcPts val="1130"/>
+                <a:spcPts val="1158"/>
               </a:lnSpc>
               <a:spcBef>
                 <a:spcPts val="0"/>
@@ -6424,7 +6766,7 @@
         </p:nvGraphicFramePr>
         <p:xfrm>
           <a:off x="411480" y="1051560"/>
-          <a:ext cx="5647944" cy="4977058"/>
+          <a:ext cx="5647944" cy="4862874"/>
         </p:xfrm>
         <a:graphic>
           <a:graphicData uri="http://schemas.openxmlformats.org/drawingml/2006/chart">
@@ -6440,8 +6782,8 @@
         </p:nvSpPr>
         <p:spPr>
           <a:xfrm>
-            <a:off x="411480" y="6065194"/>
-            <a:ext cx="32004" cy="73152"/>
+            <a:off x="411480" y="5951010"/>
+            <a:ext cx="32004" cy="147171"/>
           </a:xfrm>
           <a:prstGeom prst="rect">
             <a:avLst/>
@@ -6484,8 +6826,8 @@
         </p:nvSpPr>
         <p:spPr>
           <a:xfrm>
-            <a:off x="480060" y="6065194"/>
-            <a:ext cx="5579364" cy="73152"/>
+            <a:off x="480060" y="5951010"/>
+            <a:ext cx="5579364" cy="147171"/>
           </a:xfrm>
           <a:prstGeom prst="rect">
             <a:avLst/>
@@ -6499,6 +6841,9 @@
           <a:lstStyle/>
           <a:p>
             <a:pPr algn="l">
+              <a:lnSpc>
+                <a:spcPts val="1158"/>
+              </a:lnSpc>
               <a:spcBef>
                 <a:spcPts val="0"/>
               </a:spcBef>
@@ -6513,7 +6858,70 @@
                 </a:solidFill>
                 <a:latin typeface="Segoe UI"/>
               </a:rPr>
-              <a:t>Indexed to 100: Acme compounds ahead of everyone.</a:t>
+              <a:t>Indexed </a:t>
+            </a:r>
+            <a:r>
+              <a:rPr sz="850" b="1" i="0">
+                <a:solidFill>
+                  <a:srgbClr val="2B2B2B"/>
+                </a:solidFill>
+                <a:latin typeface="Segoe UI"/>
+              </a:rPr>
+              <a:t>to </a:t>
+            </a:r>
+            <a:r>
+              <a:rPr sz="850" b="1" i="0">
+                <a:solidFill>
+                  <a:srgbClr val="2B2B2B"/>
+                </a:solidFill>
+                <a:latin typeface="Segoe UI"/>
+              </a:rPr>
+              <a:t>100: </a:t>
+            </a:r>
+            <a:r>
+              <a:rPr sz="850" b="1" i="0">
+                <a:solidFill>
+                  <a:srgbClr val="2B2B2B"/>
+                </a:solidFill>
+                <a:latin typeface="Segoe UI"/>
+              </a:rPr>
+              <a:t>Acme </a:t>
+            </a:r>
+            <a:r>
+              <a:rPr sz="850" b="1" i="0">
+                <a:solidFill>
+                  <a:srgbClr val="2B2B2B"/>
+                </a:solidFill>
+                <a:latin typeface="Segoe UI"/>
+              </a:rPr>
+              <a:t>compounds </a:t>
+            </a:r>
+            <a:r>
+              <a:rPr sz="850" b="1" i="0">
+                <a:solidFill>
+                  <a:srgbClr val="2B2B2B"/>
+                </a:solidFill>
+                <a:latin typeface="Segoe UI"/>
+              </a:rPr>
+              <a:t>ahead </a:t>
+            </a:r>
+            <a:r>
+              <a:rPr sz="850" b="1" i="0">
+                <a:solidFill>
+                  <a:srgbClr val="2B2B2B"/>
+                </a:solidFill>
+                <a:latin typeface="Segoe UI"/>
+              </a:rPr>
+              <a:t>of </a:t>
+            </a:r>
+            <a:r>
+              <a:rPr sz="850" b="1" i="0">
+                <a:solidFill>
+                  <a:srgbClr val="2B2B2B"/>
+                </a:solidFill>
+                <a:latin typeface="Segoe UI"/>
+              </a:rPr>
+              <a:t>everyone.</a:t>
             </a:r>
           </a:p>
         </p:txBody>
@@ -6528,7 +6936,7 @@
         </p:nvGraphicFramePr>
         <p:xfrm>
           <a:off x="6132576" y="1051560"/>
-          <a:ext cx="5647944" cy="4977058"/>
+          <a:ext cx="5647944" cy="4862874"/>
         </p:xfrm>
         <a:graphic>
           <a:graphicData uri="http://schemas.openxmlformats.org/drawingml/2006/chart">
@@ -6544,8 +6952,8 @@
         </p:nvSpPr>
         <p:spPr>
           <a:xfrm>
-            <a:off x="6132576" y="6065194"/>
-            <a:ext cx="32004" cy="73152"/>
+            <a:off x="6132576" y="5951010"/>
+            <a:ext cx="32004" cy="147171"/>
           </a:xfrm>
           <a:prstGeom prst="rect">
             <a:avLst/>
@@ -6588,8 +6996,8 @@
         </p:nvSpPr>
         <p:spPr>
           <a:xfrm>
-            <a:off x="6201156" y="6065194"/>
-            <a:ext cx="5579364" cy="73152"/>
+            <a:off x="6201156" y="5951010"/>
+            <a:ext cx="5579364" cy="147171"/>
           </a:xfrm>
           <a:prstGeom prst="rect">
             <a:avLst/>
@@ -6603,6 +7011,9 @@
           <a:lstStyle/>
           <a:p>
             <a:pPr algn="l">
+              <a:lnSpc>
+                <a:spcPts val="1158"/>
+              </a:lnSpc>
               <a:spcBef>
                 <a:spcPts val="0"/>
               </a:spcBef>
@@ -6617,7 +7028,43 @@
                 </a:solidFill>
                 <a:latin typeface="Segoe UI"/>
               </a:rPr>
-              <a:t>Services approach half of revenue.</a:t>
+              <a:t>Services </a:t>
+            </a:r>
+            <a:r>
+              <a:rPr sz="850" b="1" i="0">
+                <a:solidFill>
+                  <a:srgbClr val="2B2B2B"/>
+                </a:solidFill>
+                <a:latin typeface="Segoe UI"/>
+              </a:rPr>
+              <a:t>approach </a:t>
+            </a:r>
+            <a:r>
+              <a:rPr sz="850" b="1" i="0">
+                <a:solidFill>
+                  <a:srgbClr val="2B2B2B"/>
+                </a:solidFill>
+                <a:latin typeface="Segoe UI"/>
+              </a:rPr>
+              <a:t>half </a:t>
+            </a:r>
+            <a:r>
+              <a:rPr sz="850" b="1" i="0">
+                <a:solidFill>
+                  <a:srgbClr val="2B2B2B"/>
+                </a:solidFill>
+                <a:latin typeface="Segoe UI"/>
+              </a:rPr>
+              <a:t>of </a:t>
+            </a:r>
+            <a:r>
+              <a:rPr sz="850" b="1" i="0">
+                <a:solidFill>
+                  <a:srgbClr val="2B2B2B"/>
+                </a:solidFill>
+                <a:latin typeface="Segoe UI"/>
+              </a:rPr>
+              <a:t>revenue.</a:t>
             </a:r>
           </a:p>
         </p:txBody>

--- a/eval/out/chart_variants.pptx
+++ b/eval/out/chart_variants.pptx
@@ -1571,7 +1571,9 @@
       </c:catAx>
       <c:valAx>
         <c:axId val="-2113994440"/>
-        <c:scaling/>
+        <c:scaling>
+          <c:min val="0.0"/>
+        </c:scaling>
         <c:delete val="0"/>
         <c:axPos val="l"/>
         <c:majorGridlines>
